--- a/en/slides/11-Computer_Architecture-Combinational_Machines-Lab.pptx
+++ b/en/slides/11-Computer_Architecture-Combinational_Machines-Lab.pptx
@@ -122,45 +122,45 @@
   <p:extLst>
     <p:ext uri="{521415D9-36F7-43E2-AB2F-B90AF26B5E84}">
       <p14:sectionLst xmlns:p14="http://schemas.microsoft.com/office/powerpoint/2010/main">
-        <p14:section name="Opening" id="{7ce65385-5b7d-e142-a45b-0cd05ad758ef}">
+        <p14:section name="Opening" id="{85b21734-ee68-374b-fc86-f67132344c33}">
           <p14:sldIdLst>
             <p14:sldId id="256"/>
             <p14:sldId id="257"/>
           </p14:sldIdLst>
         </p14:section>
-        <p14:section name="Warm-up on the machine" id="{dfac289f-c122-d321-7969-5b615b450a59}">
+        <p14:section name="Warm-up on the machine" id="{2cfd3b65-7b54-46e1-06ff-f242f0af420a}">
           <p14:sldIdLst>
             <p14:sldId id="258"/>
           </p14:sldIdLst>
         </p14:section>
-        <p14:section name="Decoders and encoders" id="{8c5d1d34-3d98-bc1d-b947-05e31324de3e}">
+        <p14:section name="Decoders and encoders" id="{1cc9e0f9-4506-dd5b-1c24-bddd8f9b0ae7}">
           <p14:sldIdLst>
             <p14:sldId id="259"/>
           </p14:sldIdLst>
         </p14:section>
-        <p14:section name="Multiplexers and demultiplexers" id="{e14d1a64-320e-aa3e-5ced-87aae6fadc5a}">
+        <p14:section name="Multiplexers and demultiplexers" id="{7585b2d7-8681-86cf-978b-199d81205e01}">
           <p14:sldIdLst>
             <p14:sldId id="260"/>
           </p14:sldIdLst>
         </p14:section>
-        <p14:section name="Comparing and checking" id="{c9d085d6-e0f8-7d89-d99d-49aad6f88cec}">
+        <p14:section name="Comparing and checking" id="{334e82a8-1369-817e-a9d3-c164249c400a}">
           <p14:sldIdLst>
             <p14:sldId id="261"/>
           </p14:sldIdLst>
         </p14:section>
-        <p14:section name="The arithmetic logic unit" id="{6e15db9a-4711-ebb5-7a40-0e352588c442}">
+        <p14:section name="The arithmetic logic unit" id="{357197a1-733a-c338-b42e-785af402acda}">
           <p14:sldIdLst>
             <p14:sldId id="262"/>
           </p14:sldIdLst>
         </p14:section>
-        <p14:section name="The complete program" id="{e617a762-254d-5878-394d-4545fde90c8d}">
+        <p14:section name="The complete program" id="{42a9c093-b49d-ec68-09be-eb7d95a365db}">
           <p14:sldIdLst>
             <p14:sldId id="263"/>
             <p14:sldId id="264"/>
             <p14:sldId id="265"/>
           </p14:sldIdLst>
         </p14:section>
-        <p14:section name="Run it and test it" id="{74cf1ec2-cb60-6642-7028-2303783663a6}">
+        <p14:section name="Run it and test it" id="{500ea37a-1268-fabf-234f-095e7e0fcf71}">
           <p14:sldIdLst>
             <p14:sldId id="266"/>
             <p14:sldId id="267"/>
@@ -169,7 +169,7 @@
             <p14:sldId id="270"/>
           </p14:sldIdLst>
         </p14:section>
-        <p14:section name="Exercises" id="{bf8ccc69-bd89-0d42-e73e-392f5316ba69}">
+        <p14:section name="Exercises" id="{7b15fb27-5790-a5ba-fa4d-a29bc71e0028}">
           <p14:sldIdLst>
             <p14:sldId id="271"/>
           </p14:sldIdLst>

--- a/en/slides/11-Computer_Architecture-Combinational_Machines-Lab.pptx
+++ b/en/slides/11-Computer_Architecture-Combinational_Machines-Lab.pptx
@@ -122,45 +122,45 @@
   <p:extLst>
     <p:ext uri="{521415D9-36F7-43E2-AB2F-B90AF26B5E84}">
       <p14:sectionLst xmlns:p14="http://schemas.microsoft.com/office/powerpoint/2010/main">
-        <p14:section name="Opening" id="{85b21734-ee68-374b-fc86-f67132344c33}">
+        <p14:section name="Opening" id="{5d918801-c177-e05c-2c04-bfdd927bb78c}">
           <p14:sldIdLst>
             <p14:sldId id="256"/>
             <p14:sldId id="257"/>
           </p14:sldIdLst>
         </p14:section>
-        <p14:section name="Warm-up on the machine" id="{2cfd3b65-7b54-46e1-06ff-f242f0af420a}">
+        <p14:section name="Warm-up on the machine" id="{c1fb35fb-364a-fd31-ccf1-f78339889499}">
           <p14:sldIdLst>
             <p14:sldId id="258"/>
           </p14:sldIdLst>
         </p14:section>
-        <p14:section name="Decoders and encoders" id="{1cc9e0f9-4506-dd5b-1c24-bddd8f9b0ae7}">
+        <p14:section name="Decoders and encoders" id="{f67b9e92-4590-42f6-2cdf-d80e7023bde1}">
           <p14:sldIdLst>
             <p14:sldId id="259"/>
           </p14:sldIdLst>
         </p14:section>
-        <p14:section name="Multiplexers and demultiplexers" id="{7585b2d7-8681-86cf-978b-199d81205e01}">
+        <p14:section name="Multiplexers and demultiplexers" id="{56f9c368-b4f3-1d55-4d9a-9fd1cc7d0907}">
           <p14:sldIdLst>
             <p14:sldId id="260"/>
           </p14:sldIdLst>
         </p14:section>
-        <p14:section name="Comparing and checking" id="{334e82a8-1369-817e-a9d3-c164249c400a}">
+        <p14:section name="Comparing and checking" id="{9f4712bc-811f-d143-a86b-c50583f85d21}">
           <p14:sldIdLst>
             <p14:sldId id="261"/>
           </p14:sldIdLst>
         </p14:section>
-        <p14:section name="The arithmetic logic unit" id="{357197a1-733a-c338-b42e-785af402acda}">
+        <p14:section name="The arithmetic logic unit" id="{39b6c379-13c8-894b-5805-93ef52f1b796}">
           <p14:sldIdLst>
             <p14:sldId id="262"/>
           </p14:sldIdLst>
         </p14:section>
-        <p14:section name="The complete program" id="{42a9c093-b49d-ec68-09be-eb7d95a365db}">
+        <p14:section name="The complete program" id="{c7c10d8e-3e00-ab11-ea6f-01e50541f1cb}">
           <p14:sldIdLst>
             <p14:sldId id="263"/>
             <p14:sldId id="264"/>
             <p14:sldId id="265"/>
           </p14:sldIdLst>
         </p14:section>
-        <p14:section name="Run it and test it" id="{500ea37a-1268-fabf-234f-095e7e0fcf71}">
+        <p14:section name="Run it and test it" id="{b3e471dc-26e9-58a3-99e1-da25e6d3a117}">
           <p14:sldIdLst>
             <p14:sldId id="266"/>
             <p14:sldId id="267"/>
@@ -169,7 +169,7 @@
             <p14:sldId id="270"/>
           </p14:sldIdLst>
         </p14:section>
-        <p14:section name="Exercises" id="{7b15fb27-5790-a5ba-fa4d-a29bc71e0028}">
+        <p14:section name="Exercises" id="{26f85037-017e-1766-7796-5687116907b3}">
           <p14:sldIdLst>
             <p14:sldId id="271"/>
           </p14:sldIdLst>
@@ -580,7 +580,9 @@
               <a:rPr lang="en-US" dirty="0"/>
               <a:t>This is the code deck of Lecture 11. Where the lecture deck develops the concepts, this deck contains everything that is written and executed: each listing with its commentary, the complete program of the lecture, the output it is expected to produce, and the procedure for testing it on each of the three hosts. The two decks are meant to be read together: the concepts explain the code, and the code gives the concepts an observable consequence.
 Learning status: UNDERSTAND NOW, by the end of this lecture you explain it, trace it and apply it on your own; USE NOW, you follow and use the recipe today; how it works inside is explained later, or is not part of the course; UNDERSTAND LATER, recognise the name and what it is for; a later lecture explains it. A slide without a badge is context: a story, an example, a question, an exercise.
-Learning status of this lecture. UNDERSTAND NOW: multiplexers; combinational machines; codes; decoders and encoders; comparators and parity; the ALU. USE NOW: the complete program, the PRG32 tools (used, not studied, in this course). UNDERSTAND LATER: finite-state machines (Lecture 13). A slide without a badge is context: a story, an example, a question, an exercise.</a:t>
+Learning status of this lecture. UNDERSTAND NOW: multiplexers; combinational machines; codes; decoders and encoders; comparators and parity; the ALU. USE NOW: the complete program, the PRG32 tools (used, not studied, in this course). UNDERSTAND LATER: finite-state machines (Lecture 13). A slide without a badge is context: a story, an example, a question, an exercise.
+Roadmap. Today's outcomes: (1) tell a combinational machine from a sequential one; (2) use decoders, multiplexers, comparators and parity; (3) explain the ALU as parallel units and a multiplexer. Builds on: only what Lecture 01 set up. Next: Lecture 12, Verm1, Part 2: Steering, Food and a Score.
+Bridge. In Lecture 02 an instruction was a 32-bit number, and the processor somehow knew what to do with it. Today a decoder reads a field of that number, funct3, and drives the multiplexer that picks the ALU's result. Lecture 19 describes all the fields and the fetch, decode, execute cycle. Recall: Which part of the word of an instruction tells the ALU to add rather than to compute an AND?</a:t>
             </a:r>
             <a:endParaRPr lang="en-US" dirty="0"/>
           </a:p>
